--- a/らくらく勤怠/sales/07_管理者向けマニュアル.pptx
+++ b/らくらく勤怠/sales/07_管理者向けマニュアル.pptx
@@ -4058,7 +4058,7 @@
                   <a:srgbClr val="FFFFFF"/>
                 </a:solidFill>
               </a:rPr>
-              <a:t>https://rakuraku-kintai-frb6.vercel.app/admin</a:t>
+              <a:t>https://rakuraku-kintai.vercel.app/admin</a:t>
             </a:r>
           </a:p>
         </p:txBody>

--- a/らくらく勤怠/sales/07_管理者向けマニュアル.pptx
+++ b/らくらく勤怠/sales/07_管理者向けマニュアル.pptx
@@ -4171,10 +4171,10 @@
               </a:rPr>
               <a:t>1. 上記URLをブラウザで開く（Chrome / Safari / Edge いずれもOK）
 2. パスワードを入力（別途ご連絡）
-3. 2要素認証コード（6桁）を入力
+3. 2要素認証コード（6桁）を入力（設定している場合）
 4. ダッシュボードが表示される
 ※ パスワードは絶対に他人に教えないでください
-※ 2FAコードは Google Authenticator 等のアプリで表示されます</a:t>
+※ 2要素認証は任意です。管理画面の盾アイコンから設定でき、設定すると次回のログインから6桁コードが必要になります</a:t>
             </a:r>
           </a:p>
         </p:txBody>
